--- a/docs/content/weather/weather_activity.pptx
+++ b/docs/content/weather/weather_activity.pptx
@@ -27,6 +27,7 @@
     <p:sldId id="275" r:id="rId21"/>
     <p:sldId id="276" r:id="rId22"/>
     <p:sldId id="277" r:id="rId23"/>
+    <p:sldId id="278" r:id="rId24"/>
   </p:sldIdLst>
   <p:sldSz cx="9144000" cy="5143500" type="screen16x9"/>
   <p:notesSz cx="6858000" cy="9144000"/>
@@ -9883,7 +9884,7 @@
             </a:pPr>
             <a:r>
               <a:rPr/>
-              <a:t>Getting unstuck</a:t>
+              <a:t>Extension — out of class (~30–40 min)</a:t>
             </a:r>
           </a:p>
         </p:txBody>
@@ -9903,32 +9904,255 @@
           <a:bodyPr/>
           <a:lstStyle/>
           <a:p>
+            <a:pPr lvl="0" indent="0" marL="0">
+              <a:buNone/>
+            </a:pPr>
+            <a:r>
+              <a:rPr i="1"/>
+              <a:t>Turn this in with your worksheet. You measured Duluth’s warming rate. Now run the same workflow for a </a:t>
+            </a:r>
+            <a:r>
+              <a:rPr b="1" i="1"/>
+              <a:t>city you pick</a:t>
+            </a:r>
+            <a:r>
+              <a:rPr i="1"/>
+              <a:t> and compare.</a:t>
+            </a:r>
+          </a:p>
+          <a:p>
+            <a:pPr lvl="0" indent="0" marL="1270000">
+              <a:buNone/>
+            </a:pPr>
+            <a:r>
+              <a:rPr sz="2000" b="1"/>
+              <a:t>Important</a:t>
+            </a:r>
+          </a:p>
+          <a:p>
+            <a:pPr lvl="0" indent="0" marL="1270000">
+              <a:buNone/>
+            </a:pPr>
+            <a:r>
+              <a:rPr sz="2000" b="1"/>
+              <a:t>E1 and E3 must be handwritten</a:t>
+            </a:r>
+            <a:r>
+              <a:rPr sz="2000"/>
+              <a:t> on paper, photographed, and embedded (</a:t>
+            </a:r>
+            <a:r>
+              <a:rPr sz="2000">
+                <a:latin typeface="Courier"/>
+              </a:rPr>
+              <a:t>![caption](my_photo.jpg)</a:t>
+            </a:r>
+            <a:r>
+              <a:rPr sz="2000"/>
+              <a:t>). Typed answers get </a:t>
+            </a:r>
+            <a:r>
+              <a:rPr sz="2000" b="1"/>
+              <a:t>at most half credit, even if correct</a:t>
+            </a:r>
+            <a:r>
+              <a:rPr sz="2000"/>
+              <a:t> — E1 is your prediction </a:t>
+            </a:r>
+            <a:r>
+              <a:rPr sz="2000" i="1"/>
+              <a:t>before</a:t>
+            </a:r>
+            <a:r>
+              <a:rPr sz="2000"/>
+              <a:t> you have the numbers, E3 is your own reasoning after.</a:t>
+            </a:r>
+          </a:p>
+          <a:p>
+            <a:pPr lvl="0" indent="0" marL="0">
+              <a:spcBef>
+                <a:spcPts val="3000"/>
+              </a:spcBef>
+              <a:buNone/>
+            </a:pPr>
+            <a:r>
+              <a:rPr b="1"/>
+              <a:t>E1 · Predict, then check — ✍️ by hand (3 pts) — do this FIRST</a:t>
+            </a:r>
+          </a:p>
+          <a:p>
+            <a:pPr lvl="0" indent="0" marL="0">
+              <a:buNone/>
+            </a:pPr>
+            <a:r>
+              <a:rPr b="1"/>
+              <a:t>Before downloading anything</a:t>
+            </a:r>
+            <a:r>
+              <a:rPr/>
+              <a:t>, on paper: name your city and roughly where it sits relative to Duluth (latitude, coastal vs inland). Predict whether its annual warming rate will be </a:t>
+            </a:r>
+            <a:r>
+              <a:rPr b="1"/>
+              <a:t>faster, slower, or about the same</a:t>
+            </a:r>
+            <a:r>
+              <a:rPr/>
+              <a:t> as Duluth’s, and why (one sentence of real reasoning). Photograph the page now.</a:t>
+            </a:r>
+          </a:p>
+          <a:p>
+            <a:pPr lvl="0" indent="0" marL="0">
+              <a:spcBef>
+                <a:spcPts val="3000"/>
+              </a:spcBef>
+              <a:buNone/>
+            </a:pPr>
+            <a:r>
+              <a:rPr b="1"/>
+              <a:t>E2 · Your city’s warming rate (4 pts)</a:t>
+            </a:r>
+          </a:p>
+          <a:p>
+            <a:pPr lvl="0" indent="0" marL="0">
+              <a:buNone/>
+            </a:pPr>
+            <a:r>
+              <a:rPr/>
+              <a:t>Using the same </a:t>
+            </a:r>
+            <a:r>
+              <a:rPr>
+                <a:latin typeface="Courier"/>
+              </a:rPr>
+              <a:t>GSODR</a:t>
+            </a:r>
+            <a:r>
+              <a:rPr/>
+              <a:t> workflow as the in-class part: pick a station with a long record, download it, summarize to </a:t>
+            </a:r>
+            <a:r>
+              <a:rPr b="1"/>
+              <a:t>one mean temperature per year</a:t>
+            </a:r>
+            <a:r>
+              <a:rPr/>
+              <a:t>, and fit </a:t>
+            </a:r>
+            <a:r>
+              <a:rPr>
+                <a:latin typeface="Courier"/>
+              </a:rPr>
+              <a:t>lm(TEMP ~ YEAR)</a:t>
+            </a:r>
+            <a:r>
+              <a:rPr/>
+              <a:t>.</a:t>
+            </a:r>
+          </a:p>
+          <a:p>
+            <a:pPr lvl="0" indent="0">
+              <a:buNone/>
+            </a:pPr>
+            <a:r>
+              <a:rPr>
+                <a:solidFill>
+                  <a:srgbClr val="5E5E5E"/>
+                </a:solidFill>
+                <a:latin typeface="Courier"/>
+              </a:rPr>
+              <a:t># same as class, new station id</a:t>
+            </a:r>
+            <a:br/>
+            <a:r>
+              <a:rPr>
+                <a:solidFill>
+                  <a:srgbClr val="5E5E5E"/>
+                </a:solidFill>
+                <a:latin typeface="Courier"/>
+              </a:rPr>
+              <a:t># get_GSOD(years = ..., station = "your-station") -&gt; group_by(YEAR) -&gt;</a:t>
+            </a:r>
+            <a:br/>
+            <a:r>
+              <a:rPr>
+                <a:solidFill>
+                  <a:srgbClr val="5E5E5E"/>
+                </a:solidFill>
+                <a:latin typeface="Courier"/>
+              </a:rPr>
+              <a:t>#   summarize(mean_temp = mean(TEMP, na.rm = TRUE)) -&gt; lm(mean_temp ~ YEAR)</a:t>
+            </a:r>
+          </a:p>
+          <a:p>
+            <a:pPr lvl="0" indent="0" marL="0">
+              <a:buNone/>
+            </a:pPr>
+            <a:r>
+              <a:rPr/>
+              <a:t>Report: your city + station id, years of record, the slope in </a:t>
+            </a:r>
+            <a:r>
+              <a:rPr b="1"/>
+              <a:t>°C per decade</a:t>
+            </a:r>
+            <a:r>
+              <a:rPr/>
+              <a:t> (slope × 10), its </a:t>
+            </a:r>
+            <a:r>
+              <a:rPr i="1"/>
+              <a:t>p</a:t>
+            </a:r>
+            <a:r>
+              <a:rPr/>
+              <a:t>-value, R², and whether your city is warming </a:t>
+            </a:r>
+            <a:r>
+              <a:rPr b="1"/>
+              <a:t>faster or slower</a:t>
+            </a:r>
+            <a:r>
+              <a:rPr/>
+              <a:t> than Duluth.</a:t>
+            </a:r>
+          </a:p>
+          <a:p>
+            <a:pPr lvl="0" indent="0" marL="0">
+              <a:spcBef>
+                <a:spcPts val="3000"/>
+              </a:spcBef>
+              <a:buNone/>
+            </a:pPr>
+            <a:r>
+              <a:rPr b="1"/>
+              <a:t>E3 · Explain it — ✍️ by hand, with YOUR numbers (3 pts)</a:t>
+            </a:r>
+          </a:p>
+          <a:p>
+            <a:pPr lvl="0" indent="0" marL="0">
+              <a:buNone/>
+            </a:pPr>
+            <a:r>
+              <a:rPr/>
+              <a:t>Get your E1 page back out. Using your </a:t>
+            </a:r>
+            <a:r>
+              <a:rPr b="1"/>
+              <a:t>actual</a:t>
+            </a:r>
+            <a:r>
+              <a:rPr/>
+              <a:t> numbers:</a:t>
+            </a:r>
+          </a:p>
+          <a:p>
             <a:pPr lvl="0" indent="-342900" marL="342900">
               <a:buAutoNum type="arabicPeriod"/>
             </a:pPr>
             <a:r>
-              <a:rPr b="1">
-                <a:latin typeface="Courier"/>
-              </a:rPr>
-              <a:t>get_GSOD()</a:t>
-            </a:r>
-            <a:r>
-              <a:rPr b="1"/>
-              <a:t> taking forever / failing:</a:t>
-            </a:r>
-            <a:r>
-              <a:rPr/>
-              <a:t> check your internet connection — this function reaches out to NOAA’s servers. If it keeps failing, ask for the saved </a:t>
-            </a:r>
-            <a:r>
-              <a:rPr>
-                <a:latin typeface="Courier"/>
-              </a:rPr>
-              <a:t>.csv</a:t>
-            </a:r>
-            <a:r>
-              <a:rPr/>
-              <a:t> backup.</a:t>
+              <a:rPr/>
+              <a:t>Was your prediction right? Quote your real warming rate against your guess.</a:t>
             </a:r>
           </a:p>
           <a:p>
@@ -9936,48 +10160,16 @@
               <a:buAutoNum type="arabicPeriod"/>
             </a:pPr>
             <a:r>
-              <a:rPr b="1">
-                <a:latin typeface="Courier"/>
-              </a:rPr>
-              <a:t>select()</a:t>
-            </a:r>
-            <a:r>
-              <a:rPr b="1"/>
-              <a:t> error — object not found:</a:t>
-            </a:r>
-            <a:r>
-              <a:rPr/>
-              <a:t> run </a:t>
-            </a:r>
-            <a:r>
-              <a:rPr>
-                <a:latin typeface="Courier"/>
-              </a:rPr>
-              <a:t>names(duluth_df)</a:t>
-            </a:r>
-            <a:r>
-              <a:rPr/>
-              <a:t> first to confirm exact column names; capitalization matters (</a:t>
-            </a:r>
-            <a:r>
-              <a:rPr>
-                <a:latin typeface="Courier"/>
-              </a:rPr>
-              <a:t>TEMP</a:t>
-            </a:r>
-            <a:r>
-              <a:rPr/>
-              <a:t>, not </a:t>
-            </a:r>
-            <a:r>
-              <a:rPr>
-                <a:latin typeface="Courier"/>
-              </a:rPr>
-              <a:t>temp</a:t>
-            </a:r>
-            <a:r>
-              <a:rPr/>
-              <a:t>).</a:t>
+              <a:rPr/>
+              <a:t>A single station’s significant trend does not prove </a:t>
+            </a:r>
+            <a:r>
+              <a:rPr i="1"/>
+              <a:t>why</a:t>
+            </a:r>
+            <a:r>
+              <a:rPr/>
+              <a:t> a city is warming. Name one confound that could inflate one station’s trend with nothing to do with global climate (station moved, instrument change, urban heat island).</a:t>
             </a:r>
           </a:p>
           <a:p>
@@ -9985,196 +10177,8 @@
               <a:buAutoNum type="arabicPeriod"/>
             </a:pPr>
             <a:r>
-              <a:rPr b="1">
-                <a:latin typeface="Courier"/>
-              </a:rPr>
-              <a:t>case_when()</a:t>
-            </a:r>
-            <a:r>
-              <a:rPr b="1"/>
-              <a:t> returns all </a:t>
-            </a:r>
-            <a:r>
-              <a:rPr b="1">
-                <a:latin typeface="Courier"/>
-              </a:rPr>
-              <a:t>NA</a:t>
-            </a:r>
-            <a:r>
-              <a:rPr b="1"/>
-              <a:t>:</a:t>
-            </a:r>
-            <a:r>
-              <a:rPr/>
-              <a:t> check that your conditions use </a:t>
-            </a:r>
-            <a:r>
-              <a:rPr>
-                <a:latin typeface="Courier"/>
-              </a:rPr>
-              <a:t>%in%</a:t>
-            </a:r>
-            <a:r>
-              <a:rPr/>
-              <a:t> for multiple values (</a:t>
-            </a:r>
-            <a:r>
-              <a:rPr>
-                <a:latin typeface="Courier"/>
-              </a:rPr>
-              <a:t>MONTH %in% c(6,7,8)</a:t>
-            </a:r>
-            <a:r>
-              <a:rPr/>
-              <a:t>), not </a:t>
-            </a:r>
-            <a:r>
-              <a:rPr>
-                <a:latin typeface="Courier"/>
-              </a:rPr>
-              <a:t>==</a:t>
-            </a:r>
-            <a:r>
-              <a:rPr/>
-              <a:t> with a vector.</a:t>
-            </a:r>
-          </a:p>
-          <a:p>
-            <a:pPr lvl="0" indent="-342900" marL="342900">
-              <a:buAutoNum type="arabicPeriod"/>
-            </a:pPr>
-            <a:r>
-              <a:rPr b="1">
-                <a:latin typeface="Courier"/>
-              </a:rPr>
-              <a:t>group_by()</a:t>
-            </a:r>
-            <a:r>
-              <a:rPr b="1"/>
-              <a:t> summary looks wrong:</a:t>
-            </a:r>
-            <a:r>
-              <a:rPr/>
-              <a:t> always check with </a:t>
-            </a:r>
-            <a:r>
-              <a:rPr>
-                <a:latin typeface="Courier"/>
-              </a:rPr>
-              <a:t>head()</a:t>
-            </a:r>
-            <a:r>
-              <a:rPr/>
-              <a:t> immediately after summarizing — did you group by the right combination of variables?</a:t>
-            </a:r>
-          </a:p>
-          <a:p>
-            <a:pPr lvl="0" indent="-342900" marL="342900">
-              <a:buAutoNum type="arabicPeriod"/>
-            </a:pPr>
-            <a:r>
-              <a:rPr b="1"/>
-              <a:t>Plot legend missing or wrong colors:</a:t>
-            </a:r>
-            <a:r>
-              <a:rPr/>
-              <a:t> confirm </a:t>
-            </a:r>
-            <a:r>
-              <a:rPr>
-                <a:latin typeface="Courier"/>
-              </a:rPr>
-              <a:t>color = season</a:t>
-            </a:r>
-            <a:r>
-              <a:rPr/>
-              <a:t> is inside </a:t>
-            </a:r>
-            <a:r>
-              <a:rPr>
-                <a:latin typeface="Courier"/>
-              </a:rPr>
-              <a:t>aes()</a:t>
-            </a:r>
-            <a:r>
-              <a:rPr/>
-              <a:t>, and that </a:t>
-            </a:r>
-            <a:r>
-              <a:rPr>
-                <a:latin typeface="Courier"/>
-              </a:rPr>
-              <a:t>scale_color_manual()</a:t>
-            </a:r>
-            <a:r>
-              <a:rPr/>
-              <a:t> values exactly match your </a:t>
-            </a:r>
-            <a:r>
-              <a:rPr>
-                <a:latin typeface="Courier"/>
-              </a:rPr>
-              <a:t>case_when()</a:t>
-            </a:r>
-            <a:r>
-              <a:rPr/>
-              <a:t> labels (</a:t>
-            </a:r>
-            <a:r>
-              <a:rPr>
-                <a:latin typeface="Courier"/>
-              </a:rPr>
-              <a:t>"summer"</a:t>
-            </a:r>
-            <a:r>
-              <a:rPr/>
-              <a:t>, </a:t>
-            </a:r>
-            <a:r>
-              <a:rPr>
-                <a:latin typeface="Courier"/>
-              </a:rPr>
-              <a:t>"winter"</a:t>
-            </a:r>
-            <a:r>
-              <a:rPr/>
-              <a:t>).</a:t>
-            </a:r>
-          </a:p>
-          <a:p>
-            <a:pPr lvl="0" indent="-342900" marL="342900">
-              <a:buAutoNum type="arabicPeriod"/>
-            </a:pPr>
-            <a:r>
-              <a:rPr b="1"/>
-              <a:t>Cheat sheets</a:t>
-            </a:r>
-            <a:r>
-              <a:rPr/>
-              <a:t> — </a:t>
-            </a:r>
-            <a:r>
-              <a:rPr>
-                <a:hlinkClick r:id="rId2"/>
-              </a:rPr>
-              <a:t>https://posit.co/resources/cheatsheets/</a:t>
-            </a:r>
-          </a:p>
-          <a:p>
-            <a:pPr lvl="0" indent="0" marL="1270000">
-              <a:buNone/>
-            </a:pPr>
-            <a:r>
-              <a:rPr sz="2000"/>
-              <a:t>💡 </a:t>
-            </a:r>
-            <a:r>
-              <a:rPr sz="2000" b="1"/>
-              <a:t>Key idea:</a:t>
-            </a:r>
-            <a:r>
-              <a:rPr sz="2000"/>
-              <a:t> Notice you never opened Excel for any of this — download, trim, plot, summarize, and model all happened inside the same R session. That’s the habit worth keeping for your final project, whatever data source you end up pulling from.</a:t>
+              <a:rPr/>
+              <a:t>Using your R², explain what fraction of year-to-year temperature variation is explained by year alone — and why a low R² can still accompany a real, significant warming trend.</a:t>
             </a:r>
           </a:p>
         </p:txBody>
@@ -10185,6 +10189,349 @@
 </file>
 
 <file path=ppt/slides/slide22.xml><?xml version="1.0" encoding="utf-8"?>
+<p:sld xmlns:a="http://schemas.openxmlformats.org/drawingml/2006/main" xmlns:r="http://schemas.openxmlformats.org/officeDocument/2006/relationships" xmlns:p="http://schemas.openxmlformats.org/presentationml/2006/main">
+  <p:cSld>
+    <p:spTree>
+      <p:nvGrpSpPr>
+        <p:cNvPr id="1" name=""/>
+        <p:cNvGrpSpPr/>
+        <p:nvPr/>
+      </p:nvGrpSpPr>
+      <p:grpSpPr>
+        <a:xfrm>
+          <a:off x="0" y="0"/>
+          <a:ext cx="0" cy="0"/>
+          <a:chOff x="0" y="0"/>
+          <a:chExt cx="0" cy="0"/>
+        </a:xfrm>
+      </p:grpSpPr>
+      <p:sp>
+        <p:nvSpPr>
+          <p:cNvPr id="2" name="Title 1"/>
+          <p:cNvSpPr>
+            <a:spLocks noGrp="1"/>
+          </p:cNvSpPr>
+          <p:nvPr>
+            <p:ph type="title"/>
+          </p:nvPr>
+        </p:nvSpPr>
+        <p:spPr>
+          <a:xfrm>
+            <a:off x="0" y="0"/>
+            <a:ext cx="9144000" cy="582780"/>
+          </a:xfrm>
+        </p:spPr>
+        <p:txBody>
+          <a:bodyPr/>
+          <a:lstStyle/>
+          <a:p>
+            <a:pPr lvl="0" indent="0" marL="0">
+              <a:buNone/>
+            </a:pPr>
+            <a:r>
+              <a:rPr/>
+              <a:t>Getting unstuck</a:t>
+            </a:r>
+          </a:p>
+        </p:txBody>
+      </p:sp>
+      <p:sp>
+        <p:nvSpPr>
+          <p:cNvPr id="3" name="Content Placeholder 2"/>
+          <p:cNvSpPr>
+            <a:spLocks noGrp="1"/>
+          </p:cNvSpPr>
+          <p:nvPr>
+            <p:ph idx="1"/>
+          </p:nvPr>
+        </p:nvSpPr>
+        <p:spPr/>
+        <p:txBody>
+          <a:bodyPr/>
+          <a:lstStyle/>
+          <a:p>
+            <a:pPr lvl="0" indent="-342900" marL="342900">
+              <a:buAutoNum type="arabicPeriod"/>
+            </a:pPr>
+            <a:r>
+              <a:rPr b="1">
+                <a:latin typeface="Courier"/>
+              </a:rPr>
+              <a:t>get_GSOD()</a:t>
+            </a:r>
+            <a:r>
+              <a:rPr b="1"/>
+              <a:t> taking forever / failing:</a:t>
+            </a:r>
+            <a:r>
+              <a:rPr/>
+              <a:t> check your internet connection — this function reaches out to NOAA’s servers. If it keeps failing, ask for the saved </a:t>
+            </a:r>
+            <a:r>
+              <a:rPr>
+                <a:latin typeface="Courier"/>
+              </a:rPr>
+              <a:t>.csv</a:t>
+            </a:r>
+            <a:r>
+              <a:rPr/>
+              <a:t> backup.</a:t>
+            </a:r>
+          </a:p>
+          <a:p>
+            <a:pPr lvl="0" indent="-342900" marL="342900">
+              <a:buAutoNum type="arabicPeriod"/>
+            </a:pPr>
+            <a:r>
+              <a:rPr b="1">
+                <a:latin typeface="Courier"/>
+              </a:rPr>
+              <a:t>select()</a:t>
+            </a:r>
+            <a:r>
+              <a:rPr b="1"/>
+              <a:t> error — object not found:</a:t>
+            </a:r>
+            <a:r>
+              <a:rPr/>
+              <a:t> run </a:t>
+            </a:r>
+            <a:r>
+              <a:rPr>
+                <a:latin typeface="Courier"/>
+              </a:rPr>
+              <a:t>names(duluth_df)</a:t>
+            </a:r>
+            <a:r>
+              <a:rPr/>
+              <a:t> first to confirm exact column names; capitalization matters (</a:t>
+            </a:r>
+            <a:r>
+              <a:rPr>
+                <a:latin typeface="Courier"/>
+              </a:rPr>
+              <a:t>TEMP</a:t>
+            </a:r>
+            <a:r>
+              <a:rPr/>
+              <a:t>, not </a:t>
+            </a:r>
+            <a:r>
+              <a:rPr>
+                <a:latin typeface="Courier"/>
+              </a:rPr>
+              <a:t>temp</a:t>
+            </a:r>
+            <a:r>
+              <a:rPr/>
+              <a:t>).</a:t>
+            </a:r>
+          </a:p>
+          <a:p>
+            <a:pPr lvl="0" indent="-342900" marL="342900">
+              <a:buAutoNum type="arabicPeriod"/>
+            </a:pPr>
+            <a:r>
+              <a:rPr b="1">
+                <a:latin typeface="Courier"/>
+              </a:rPr>
+              <a:t>case_when()</a:t>
+            </a:r>
+            <a:r>
+              <a:rPr b="1"/>
+              <a:t> returns all </a:t>
+            </a:r>
+            <a:r>
+              <a:rPr b="1">
+                <a:latin typeface="Courier"/>
+              </a:rPr>
+              <a:t>NA</a:t>
+            </a:r>
+            <a:r>
+              <a:rPr b="1"/>
+              <a:t>:</a:t>
+            </a:r>
+            <a:r>
+              <a:rPr/>
+              <a:t> check that your conditions use </a:t>
+            </a:r>
+            <a:r>
+              <a:rPr>
+                <a:latin typeface="Courier"/>
+              </a:rPr>
+              <a:t>%in%</a:t>
+            </a:r>
+            <a:r>
+              <a:rPr/>
+              <a:t> for multiple values (</a:t>
+            </a:r>
+            <a:r>
+              <a:rPr>
+                <a:latin typeface="Courier"/>
+              </a:rPr>
+              <a:t>MONTH %in% c(6,7,8)</a:t>
+            </a:r>
+            <a:r>
+              <a:rPr/>
+              <a:t>), not </a:t>
+            </a:r>
+            <a:r>
+              <a:rPr>
+                <a:latin typeface="Courier"/>
+              </a:rPr>
+              <a:t>==</a:t>
+            </a:r>
+            <a:r>
+              <a:rPr/>
+              <a:t> with a vector.</a:t>
+            </a:r>
+          </a:p>
+          <a:p>
+            <a:pPr lvl="0" indent="-342900" marL="342900">
+              <a:buAutoNum type="arabicPeriod"/>
+            </a:pPr>
+            <a:r>
+              <a:rPr b="1">
+                <a:latin typeface="Courier"/>
+              </a:rPr>
+              <a:t>group_by()</a:t>
+            </a:r>
+            <a:r>
+              <a:rPr b="1"/>
+              <a:t> summary looks wrong:</a:t>
+            </a:r>
+            <a:r>
+              <a:rPr/>
+              <a:t> always check with </a:t>
+            </a:r>
+            <a:r>
+              <a:rPr>
+                <a:latin typeface="Courier"/>
+              </a:rPr>
+              <a:t>head()</a:t>
+            </a:r>
+            <a:r>
+              <a:rPr/>
+              <a:t> immediately after summarizing — did you group by the right combination of variables?</a:t>
+            </a:r>
+          </a:p>
+          <a:p>
+            <a:pPr lvl="0" indent="-342900" marL="342900">
+              <a:buAutoNum type="arabicPeriod"/>
+            </a:pPr>
+            <a:r>
+              <a:rPr b="1"/>
+              <a:t>Plot legend missing or wrong colors:</a:t>
+            </a:r>
+            <a:r>
+              <a:rPr/>
+              <a:t> confirm </a:t>
+            </a:r>
+            <a:r>
+              <a:rPr>
+                <a:latin typeface="Courier"/>
+              </a:rPr>
+              <a:t>color = season</a:t>
+            </a:r>
+            <a:r>
+              <a:rPr/>
+              <a:t> is inside </a:t>
+            </a:r>
+            <a:r>
+              <a:rPr>
+                <a:latin typeface="Courier"/>
+              </a:rPr>
+              <a:t>aes()</a:t>
+            </a:r>
+            <a:r>
+              <a:rPr/>
+              <a:t>, and that </a:t>
+            </a:r>
+            <a:r>
+              <a:rPr>
+                <a:latin typeface="Courier"/>
+              </a:rPr>
+              <a:t>scale_color_manual()</a:t>
+            </a:r>
+            <a:r>
+              <a:rPr/>
+              <a:t> values exactly match your </a:t>
+            </a:r>
+            <a:r>
+              <a:rPr>
+                <a:latin typeface="Courier"/>
+              </a:rPr>
+              <a:t>case_when()</a:t>
+            </a:r>
+            <a:r>
+              <a:rPr/>
+              <a:t> labels (</a:t>
+            </a:r>
+            <a:r>
+              <a:rPr>
+                <a:latin typeface="Courier"/>
+              </a:rPr>
+              <a:t>"summer"</a:t>
+            </a:r>
+            <a:r>
+              <a:rPr/>
+              <a:t>, </a:t>
+            </a:r>
+            <a:r>
+              <a:rPr>
+                <a:latin typeface="Courier"/>
+              </a:rPr>
+              <a:t>"winter"</a:t>
+            </a:r>
+            <a:r>
+              <a:rPr/>
+              <a:t>).</a:t>
+            </a:r>
+          </a:p>
+          <a:p>
+            <a:pPr lvl="0" indent="-342900" marL="342900">
+              <a:buAutoNum type="arabicPeriod"/>
+            </a:pPr>
+            <a:r>
+              <a:rPr b="1"/>
+              <a:t>Cheat sheets</a:t>
+            </a:r>
+            <a:r>
+              <a:rPr/>
+              <a:t> — </a:t>
+            </a:r>
+            <a:r>
+              <a:rPr>
+                <a:hlinkClick r:id="rId2"/>
+              </a:rPr>
+              <a:t>https://posit.co/resources/cheatsheets/</a:t>
+            </a:r>
+          </a:p>
+          <a:p>
+            <a:pPr lvl="0" indent="0" marL="1270000">
+              <a:buNone/>
+            </a:pPr>
+            <a:r>
+              <a:rPr sz="2000"/>
+              <a:t>💡 </a:t>
+            </a:r>
+            <a:r>
+              <a:rPr sz="2000" b="1"/>
+              <a:t>Key idea:</a:t>
+            </a:r>
+            <a:r>
+              <a:rPr sz="2000"/>
+              <a:t> Notice you never opened Excel for any of this — download, trim, plot, summarize, and model all happened inside the same R session. That’s the habit worth keeping for your final project, whatever data source you end up pulling from.</a:t>
+            </a:r>
+          </a:p>
+        </p:txBody>
+      </p:sp>
+    </p:spTree>
+  </p:cSld>
+</p:sld>
+</file>
+
+<file path=ppt/slides/slide23.xml><?xml version="1.0" encoding="utf-8"?>
 <p:sld xmlns:a="http://schemas.openxmlformats.org/drawingml/2006/main" xmlns:r="http://schemas.openxmlformats.org/officeDocument/2006/relationships" xmlns:p="http://schemas.openxmlformats.org/presentationml/2006/main">
   <p:cSld>
     <p:spTree>
@@ -10221,7 +10568,7 @@
             </a:pPr>
             <a:r>
               <a:rPr i="1"/>
-              <a:t>End of Worksheet 06. Next: Homework — repeat this entire workflow for a city of your choice and compare your city’s warming rate to Duluth’s.</a:t>
+              <a:t>End of the Weather Data worksheet.</a:t>
             </a:r>
           </a:p>
         </p:txBody>
